--- a/lgtm-presentation/K8s-Environment-Access-Policies.pptx
+++ b/lgtm-presentation/K8s-Environment-Access-Policies.pptx
@@ -519,7 +519,7 @@
           <a:lstStyle/>
           <a:p>
             <a:r>
-              <a:t>Welcome the audience and set context. This deck covers environment access governance for Kubernetes — the policies, guardrails, and automation that separate a cluster where developers can safely experiment from one where a single misconfigured kubectl command wipes production. We will walk through a layered model: RBAC for identity-based access, NetworkPolicy for traffic segmentation, OPA Gatekeeper for admission control, and GitOps for change management. The goal is a concrete, implementable framework that scales from a single dev namespace to a multi-team production fleet. By the end, the audience should understand not just what each layer does, but how they compose into a defense-in-depth posture across dev, test, and production environments. Ask the audience: how many of you have a documented policy for who can do what in your production Kubernetes cluster? The answer usually reveals the gap this deck fills.</a:t>
+              <a:t>Welcome the audience and set context. The subject is environment access governance for Kubernetes: the policies, guardrails, and automation that separate a cluster where developers can safely experiment from one where a single misconfigured kubectl command wipes production. We will walk through a layered model: RBAC for identity-based access, NetworkPolicy for traffic segmentation, OPA Gatekeeper for admission control, and GitOps for change management. The goal is a concrete, implementable framework that scales from a single dev namespace to a multi-team production fleet. By the end, the audience should understand not just what each layer does, but how they compose into a defense-in-depth posture across dev, test, and production environments. Ask the audience: how many of you have a documented policy for who can do what in your production Kubernetes cluster? The answer usually reveals the gap this deck fills.</a:t>
             </a:r>
           </a:p>
         </p:txBody>
@@ -589,7 +589,7 @@
           <a:lstStyle/>
           <a:p>
             <a:r>
-              <a:t>Policy decisions in a cloud-native architecture happen at four layers, each with a distinct scope and toolset. At the edge and ingress layer, the ingress controller or cloud load balancer handles TLS termination, host-based routing, and DDoS mitigation. The API gateway layer — Kong, Ambassador, Envoy Gateway — handles authentication, rate limiting, and API key validation. The service mesh layer — Istio with Envoy sidecars — provides mTLS encryption, AuthorizationPolicy for identity-based access control, circuit breaking, and retry budgets. The in-app layer handles business rules, feature flags, and tenant isolation. Each layer adds capability but also latency — roughly one to three milliseconds per L7 hop. The governance principle is to place policies at the lowest layer that has the information needed to decide. TLS belongs at the edge, authentication at the gateway, service identity at the mesh, and business logic in the application. Point to the diagram showing the north-south and east-west request paths. The mesh is the same L7 routing applied to every internal call, not just at the edge.</a:t>
+              <a:t>Policy decisions in a cloud-native architecture happen at four layers, each with a distinct scope and toolset. At the edge and ingress layer, the ingress controller or cloud load balancer handles TLS termination, host-based routing, and DDoS mitigation. The API gateway layer (Kong, Ambassador, Envoy Gateway) handles authentication, rate limiting, and API key validation. The service mesh layer (Istio with Envoy sidecars) provides mTLS encryption, AuthorizationPolicy for identity-based access control, circuit breaking, and retry budgets. The in-app layer handles business rules, feature flags, and tenant isolation. Each layer adds capability but also latency — roughly one to three milliseconds per L7 hop. The governance principle is to place policies at the lowest layer that has the information needed to decide. TLS belongs at the edge, authentication at the gateway, service identity at the mesh, and business logic in the application. Point to the diagram showing the north-south and east-west request paths. The mesh is the same L7 routing applied to every internal call, not just at the edge.</a:t>
             </a:r>
           </a:p>
         </p:txBody>
@@ -659,7 +659,7 @@
           <a:lstStyle/>
           <a:p>
             <a:r>
-              <a:t>Inside the service mesh, Istio AuthorizationPolicy provides namespace-scoped, identity-based access control. Every workload gets a SPIFFE identity in the form cluster.local/ns/namespace/sa/service-account, and policies control which identities can call which endpoints. The example on the slide shows that only order-service in the orders namespace can POST to the /reserve endpoint on inventory — no other service, no other method, no other path is allowed. This is zero-trust at the service level: even if a pod is compromised, it can only call the exact endpoints its identity is authorized for. Combined with mTLS, which the mesh enables by default, every service-to-service call is authenticated with cryptographic identity, encrypted in transit, and authorized against a declared policy. The application code does not need to implement any of this — the mesh enforces it transparently via the sidecar proxy. This is particularly powerful in production where you want to guarantee that services can only communicate along defined paths, regardless of what the application code attempts.</a:t>
+              <a:t>Inside the service mesh, Istio AuthorizationPolicy provides namespace-scoped, identity-based access control. Every workload gets a SPIFFE identity in the form cluster.local/ns/namespace/sa/service-account, and policies control which identities can call which endpoints. The example on the slide shows that only order-service in the orders namespace can POST to the /reserve endpoint on inventory — no other service, no other method, no other path is allowed. This is zero-trust at the service level: even if a pod is compromised, it can only call the exact endpoints its identity is authorized for. Combined with mTLS, which the mesh enables by default, every service-to-service call is authenticated with cryptographic identity, encrypted in transit, and authorized against a declared policy. The application code does not need to implement any of this — the mesh enforces it transparently via the sidecar proxy. In production this guarantees that services communicate only along defined paths, regardless of what the application code attempts.</a:t>
             </a:r>
           </a:p>
         </p:txBody>
@@ -869,7 +869,7 @@
           <a:lstStyle/>
           <a:p>
             <a:r>
-              <a:t>Every policy change — NetworkPolicy, RBAC Role, OPA Constraint, ResourceQuota — flows through the same validation pipeline before reaching any cluster. Walk through the stages: schema validation with kubeval or kubeconform catches invalid YAML and wrong API versions. Policy lint with conftest or the Kyverno CLI catches organizational policy violations like untrusted registries or missing resource limits. Dry-run apply with kubectl apply --dry-run=server catches API server rejections like quota exceeded or admission denial. Staging deploy via ArgoCD sync catches runtime failures, misconfigured selectors, and broken connectivity. Smoke tests with curl, hey, or newman verify service health, API contracts, and latency regression. An approval gate requires human sign-off from the platform or SRE team. Finally, prod deploy applies the identical manifests that were proven in staging. Point to the diagram showing the linear pipeline. The key principle: the CI pipeline is the only path to production. No exceptions, no emergency kubectl apply, no just this once. If the pipeline is too slow for emergencies, fix the pipeline — do not bypass it.</a:t>
+              <a:t>Every policy change (NetworkPolicy, RBAC Role, OPA Constraint, ResourceQuota) flows through the same validation pipeline before reaching any cluster. Walk through the stages: schema validation with kubeconform v0.8.0 catches invalid YAML, unknown fields and wrong API versions, including custom resources through the CRDs-catalog schemas. Policy lint with conftest or the Kyverno CLI catches organizational policy violations like untrusted registries or missing resource limits. Dry-run apply with kubectl apply --dry-run=server catches API server rejections like quota exceeded or admission denial. Staging deploy via ArgoCD sync catches runtime failures, misconfigured selectors, and broken connectivity. Smoke tests with curl, hey, or newman verify service health, API contracts, and latency regression. An approval gate requires human sign-off from the platform or SRE team. Finally, prod deploy applies the identical manifests that were proven in staging. Point to the diagram showing the linear pipeline. The key principle: the CI pipeline is the only path to production. No exceptions, no emergency kubectl apply, no just this once. If the pipeline is too slow for emergencies, fix the pipeline — do not bypass it.</a:t>
             </a:r>
           </a:p>
         </p:txBody>
@@ -939,7 +939,7 @@
           <a:lstStyle/>
           <a:p>
             <a:r>
-              <a:t>Governance requires more than access control — it requires proof that the controls are working. Walk through four audit dimensions. API server audit logs capture every kubectl command and API call with user identity, timestamp, resource, and verb — configure at the Metadata or Request level for sensitive resources like Secrets, RBAC objects, and NetworkPolicies. OPA decision logs record every admission decision — allow or deny — with the policy that matched and the object that triggered it. With GitOps, Git history becomes the audit trail: every production change is a Git commit with author, reviewer, timestamp, and diff — this is exactly what compliance teams want when they ask who changed what and when. Finally, establish a quarterly RBAC review cadence: review who has access to what, remove stale bindings, verify no human has cluster-admin, and scan for namespaces missing default-deny using tools like kubectl np-viewer or Cilium's policy visualization. The combination of API server logs, OPA decision logs, and Git history creates a complete compliance trail.</a:t>
+              <a:t>Governance requires more than access control — it requires proof that the controls are working. Walk through four audit dimensions. API server audit logs capture every kubectl command and API call with user identity, timestamp, resource, and verb — configure at the Metadata or Request level for sensitive resources like Secrets, RBAC objects, and NetworkPolicies. OPA decision logs record every admission decision, allow or deny, with the policy that matched and the object that triggered it. With GitOps, Git history becomes the audit trail: every production change is a Git commit with author, reviewer, timestamp, and diff — this is exactly what compliance teams want when they ask who changed what and when. Finally, establish a quarterly RBAC review cadence: review who has access to what, remove stale bindings, verify no human has cluster-admin, and scan for namespaces missing default-deny using tools like kubectl np-viewer or Cilium's policy visualization. The combination of API server logs, OPA decision logs, and Git history creates a complete compliance trail.</a:t>
             </a:r>
           </a:p>
         </p:txBody>
@@ -1149,7 +1149,7 @@
           <a:lstStyle/>
           <a:p>
             <a:r>
-              <a:t>Point the audience to the authoritative sources for deeper reading. The Kubernetes RBAC Good Practices page is the official guidance on least privilege, namespace-scoped roles, and audit logging. The NetworkPolicy documentation covers the spec and includes worked examples. OPA Gatekeeper and Kyverno are the two leading admission controllers — both open source, both CNCF. The Istio AuthorizationPolicy reference is the specification for service-level zero-trust. ArgoCD and Flux are the two leading GitOps operators. The CNCF Cloud Native Security Whitepaper is the industry-consensus framework for cloud-native security posture, covering supply chain, runtime, and governance. Pod Security Standards define the three levels — privileged, baseline, restricted — that replace the deprecated PodSecurityPolicy. SPIFFE and SPIRE provide the workload identity framework that underpins mesh-based AuthorizationPolicy. Encourage the audience to start with the RBAC Good Practices and the CNCF whitepaper — together they cover most of what this deck presented.</a:t>
+              <a:t>Point the audience to the authoritative sources for deeper reading. The Kubernetes RBAC Good Practices page is the official guidance on least privilege, namespace-scoped roles, and audit logging. The NetworkPolicy documentation covers the spec and includes worked examples. OPA Gatekeeper and Kyverno are the two leading admission controllers — both open source, both CNCF. The Istio AuthorizationPolicy reference is the specification for service-level zero-trust. ArgoCD and Flux are the two leading GitOps operators. The CNCF Cloud Native Security Whitepaper is the industry-consensus framework for cloud-native security posture, covering supply chain, runtime, and governance. Pod Security Standards define three levels (privileged, baseline, restricted) and replace PodSecurityPolicy, which was removed in Kubernetes 1.25. SPIFFE and SPIRE provide the workload identity framework that underpins mesh-based AuthorizationPolicy. Encourage the audience to start with the RBAC Good Practices and the CNCF whitepaper — together they cover most of what this deck presented.</a:t>
             </a:r>
           </a:p>
         </p:txBody>
@@ -1219,7 +1219,7 @@
           <a:lstStyle/>
           <a:p>
             <a:r>
-              <a:t>Open with the cost of ungoverned access. Every team running Kubernetes hits the same pain points: a developer runs kubectl delete namespace in the wrong context and wipes production workloads. Network policies that were never tested allow lateral movement after a container is compromised. An auditor asks who changed the firewall rules last Tuesday and nobody can produce an answer. Configuration drift between environments means staging never catches what breaks in production. These are not hypothetical — they are incidents that happen in real organizations every quarter. The cost is measured in outages, security incidents, compliance failures, and engineering hours spent on incident response instead of building features. The fix is not one tool but a layered policy model — RBAC, NetworkPolicy, admission control, and GitOps — applied with increasing strictness as you move from dev through test to production. Frame this as the motivation for everything that follows.</a:t>
+              <a:t>Open with the cost of ungoverned access. Every team running Kubernetes hits the same pain points: a developer runs kubectl delete namespace in the wrong context and wipes production workloads. Network policies that were never tested allow lateral movement after a container is compromised. An auditor asks who changed the firewall rules last Tuesday and nobody can produce an answer. Configuration drift between environments means staging never catches what breaks in production. These are not hypothetical — they are incidents that happen in real organizations every quarter. The cost is measured in outages, security incidents, compliance failures, and engineering hours spent on incident response instead of building features. The fix is not one tool but a layered policy model (RBAC, NetworkPolicy, admission control, and GitOps) applied with increasing strictness from dev through test to production. Frame this as the motivation for everything that follows.</a:t>
             </a:r>
           </a:p>
         </p:txBody>
@@ -1289,7 +1289,7 @@
           <a:lstStyle/>
           <a:p>
             <a:r>
-              <a:t>Walk through the three environments as a risk gradient. Dev is where developers experiment, iterate, and break things — full self-service within their own namespace, deploy on every commit, permissive networking. The blast radius is one developer's sandbox. Test and staging exist to validate before promotion — CI-driven deploys, read-only manual access, and network topology that mirrors production exactly. If production only allows order-service to reach inventory on port 8080, test enforces the same rule. Production serves real users — strictly read-only for all humans, every change flows through a GitOps pipeline, strict micro-segmentation. The key principle is that freedom increases as risk decreases: dev is the most permissive, prod is the most restrictive, and test mirrors prod so what passes test also passes prod. Point to the diagram showing the three columns and stress that the RBAC verbs and deploy mechanisms differ by environment. This gradient drives every policy decision in the rest of the deck.</a:t>
+              <a:t>Walk through the three environments as a risk gradient. Dev is where developers experiment, iterate, and break things — full self-service within their own namespace, deploy on every commit, permissive networking. The blast radius is one developer's sandbox. Test and staging exist to validate before promotion — CI-driven deploys, read-only manual access, and network topology that mirrors production exactly. If production only allows order-service to reach inventory on port 8080, test enforces the same rule. Production serves real users — strictly read-only for all humans, every change flows through a GitOps pipeline, strict micro-segmentation. The key principle is that freedom increases as risk decreases: dev is the most permissive, prod is the most restrictive, and test mirrors prod so what passes test also passes prod. Point to the diagram showing the three columns and stress that the RBAC verbs and deploy mechanisms differ by environment. This gradient drives every policy decision in the model.</a:t>
             </a:r>
           </a:p>
         </p:txBody>
@@ -1359,7 +1359,7 @@
           <a:lstStyle/>
           <a:p>
             <a:r>
-              <a:t>Introduce Kubernetes RBAC as the primary gate. There are four objects: Role (namespace-scoped permissions), ClusterRole (cluster-wide or reusable via RoleBinding), RoleBinding (grants a Role to a user, group, or service account in a namespace), and ClusterRoleBinding (grants cluster-wide). The critical distinction is the verbs: get, list, and watch are read-only; create, update, patch, and delete are write operations. The governance question is which verbs each persona gets in each environment. Industry best practice from the official Kubernetes RBAC Good Practices documentation recommends least privilege, no cluster-admin for human users, namespace-scoped roles over cluster roles, audit logging of all RBAC decisions, and quarterly review of bindings to remove stale access. Emphasize that RBAC is the foundation — it controls who can act — but it is not sufficient alone. You also need admission control to govern what they can create, and NetworkPolicy to govern what traffic can flow. The next slide maps these verbs to specific environments.</a:t>
+              <a:t>Introduce Kubernetes RBAC as the primary gate. There are four objects: Role (namespace-scoped permissions), ClusterRole (cluster-wide or reusable via RoleBinding), RoleBinding (grants a Role to a user, group, or service account in a namespace), and ClusterRoleBinding (grants cluster-wide). The critical distinction is the verbs: get, list, and watch are read-only; create, update, patch, and delete are write operations. The governance question is which verbs each persona gets in each environment. Industry best practice from the official Kubernetes RBAC Good Practices documentation recommends least privilege, no cluster-admin for human users, namespace-scoped roles over cluster roles, audit logging of all RBAC decisions, and quarterly review of bindings to remove stale access. RBAC is the foundation because it controls who can act, but it is not sufficient alone. You also need admission control to govern what they can create, and NetworkPolicy to govern what traffic can flow. The environment-specific RBAC matrix maps these verbs to each environment.</a:t>
             </a:r>
           </a:p>
         </p:txBody>
@@ -1709,7 +1709,7 @@
           <a:lstStyle/>
           <a:p>
             <a:r>
-              <a:t>In production, no human runs kubectl apply. Every change follows a GitOps pipeline: the developer opens a PR against the environment repo or a kustomize overlay for the prod branch. CI validates — kubeval checks YAML schema, conftest runs OPA policies, a staging deployment proves the change does not break. A peer reviewer from the platform or SRE team approves. The merge triggers ArgoCD or Flux to sync the cluster state to match Git. If someone manually changes the cluster, ArgoCD detects the drift and either alerts or auto-reverts to the Git-declared state. This gives you three things compliance teams care about: a complete audit trail in Git history, separation of duties where the developer proposes and the SRE approves, and reproducibility where any cluster state can be rebuilt from Git. Point to the diagram showing the pipeline from developer through Git repo, CI lint, staging, approval, ArgoCD, and finally the production cluster with drift detection looping back. Stress: the only path to production is a merged PR. No exceptions, no bypass.</a:t>
+              <a:t>In production, no human runs kubectl apply. Every change follows a GitOps pipeline: the developer opens a PR against the environment repo or a kustomize overlay for the prod branch. CI validates: kubeconform v0.8.0 checks the manifests against the Kubernetes and CRD schemas, conftest runs OPA policies, and a staging deployment proves the change does not break. A peer reviewer from the platform or SRE team approves. The merge triggers ArgoCD or Flux to sync the cluster state to match Git. If someone manually changes the cluster, ArgoCD detects the drift and either alerts or auto-reverts to the Git-declared state. This gives you three things compliance teams care about: a complete audit trail in Git history, separation of duties where the developer proposes and the SRE approves, and reproducibility where any cluster state can be rebuilt from Git. Point to the diagram showing the pipeline from developer through Git repo, CI lint, staging, approval, ArgoCD, and finally the production cluster with drift detection looping back. Stress: the only path to production is a merged PR. No exceptions, no bypass.</a:t>
             </a:r>
           </a:p>
         </p:txBody>
@@ -5024,15 +5024,15 @@
           <p:nvPr/>
         </p:nvPicPr>
         <p:blipFill>
-          <a:blip r:embed="rId2"/>
+          <a:blip r:embed="rId5"/>
           <a:stretch>
             <a:fillRect/>
           </a:stretch>
         </p:blipFill>
         <p:spPr>
           <a:xfrm>
-            <a:off x="566928" y="3800200"/>
-            <a:ext cx="9370054" cy="2143400"/>
+            <a:off x="2615083" y="3800200"/>
+            <a:ext cx="5273743" cy="2143400"/>
           </a:xfrm>
           <a:prstGeom prst="rect">
             <a:avLst/>
@@ -5600,15 +5600,15 @@
           <p:nvPr/>
         </p:nvPicPr>
         <p:blipFill>
-          <a:blip r:embed="rId2"/>
+          <a:blip r:embed="rId5"/>
           <a:stretch>
             <a:fillRect/>
           </a:stretch>
         </p:blipFill>
         <p:spPr>
           <a:xfrm>
-            <a:off x="566928" y="3800200"/>
-            <a:ext cx="8364487" cy="2143400"/>
+            <a:off x="1661970" y="3800200"/>
+            <a:ext cx="6174403" cy="2143400"/>
           </a:xfrm>
           <a:prstGeom prst="rect">
             <a:avLst/>
@@ -5882,15 +5882,15 @@
           <p:nvPr/>
         </p:nvPicPr>
         <p:blipFill>
-          <a:blip r:embed="rId2"/>
+          <a:blip r:embed="rId5"/>
           <a:stretch>
             <a:fillRect/>
           </a:stretch>
         </p:blipFill>
         <p:spPr>
           <a:xfrm>
-            <a:off x="566928" y="3800200"/>
-            <a:ext cx="10717000" cy="2143400"/>
+            <a:off x="2912617" y="3800200"/>
+            <a:ext cx="6025622" cy="2143400"/>
           </a:xfrm>
           <a:prstGeom prst="rect">
             <a:avLst/>
@@ -6114,7 +6114,7 @@
                 </a:solidFill>
                 <a:latin typeface="Red Hat Text"/>
               </a:rPr>
-              <a:t>Every policy change flows through: Schema validation (kubeval) → Policy lint (conftest/kyverno) → Dry-run apply (kubectl --dry-run=server) → Staging deploy (ArgoCD sync) → Smoke test (curl/hey/newman) → Approval gate (PR review) → Prod deploy.</a:t>
+              <a:t>Every policy change flows through: Schema validation (kubeconform) → Policy lint (conftest/kyverno) → Dry-run apply (kubectl --dry-run=server) → Staging deploy (ArgoCD sync) → Smoke test (curl/hey/newman) → Approval gate (PR review) → Prod deploy.</a:t>
             </a:r>
           </a:p>
           <a:p>
@@ -6164,15 +6164,15 @@
           <p:nvPr/>
         </p:nvPicPr>
         <p:blipFill>
-          <a:blip r:embed="rId2"/>
+          <a:blip r:embed="rId5"/>
           <a:stretch>
             <a:fillRect/>
           </a:stretch>
         </p:blipFill>
         <p:spPr>
           <a:xfrm>
-            <a:off x="566928" y="3800200"/>
-            <a:ext cx="11057700" cy="1382212"/>
+            <a:off x="2984690" y="3800200"/>
+            <a:ext cx="6222176" cy="1382212"/>
           </a:xfrm>
           <a:prstGeom prst="rect">
             <a:avLst/>
@@ -7314,7 +7314,7 @@
                 </a:solidFill>
                 <a:latin typeface="Red Hat Text"/>
               </a:rPr>
-              <a:t>ArgoCD — argo-cd.readthedocs.io  ·  Flux — fluxcd.io</a:t>
+              <a:t>ArgoCD: argo-cd.readthedocs.io  ·  Flux: fluxcd.io</a:t>
             </a:r>
           </a:p>
           <a:p>
@@ -7590,7 +7590,7 @@
                 </a:solidFill>
                 <a:latin typeface="Red Hat Text"/>
               </a:rPr>
-              <a:t>The fix is a layered policy model — RBAC, NetworkPolicy, admission control, and GitOps — applied differently per environment.</a:t>
+              <a:t>The fix is a layered policy model (RBAC, NetworkPolicy, admission control, and GitOps) applied differently per environment.</a:t>
             </a:r>
           </a:p>
         </p:txBody>
@@ -7776,7 +7776,7 @@
                 </a:solidFill>
                 <a:latin typeface="Overpass SemiBold"/>
               </a:rPr>
-              <a:t>Three environments, three risk profiles</a:t>
+              <a:t>Risk profiles by environment</a:t>
             </a:r>
           </a:p>
         </p:txBody>
@@ -7880,15 +7880,15 @@
           <p:nvPr/>
         </p:nvPicPr>
         <p:blipFill>
-          <a:blip r:embed="rId2"/>
+          <a:blip r:embed="rId5"/>
           <a:stretch>
             <a:fillRect/>
           </a:stretch>
         </p:blipFill>
         <p:spPr>
           <a:xfrm>
-            <a:off x="566928" y="3800200"/>
-            <a:ext cx="10086588" cy="2143400"/>
+            <a:off x="2773965" y="3800200"/>
+            <a:ext cx="5672514" cy="2143400"/>
           </a:xfrm>
           <a:prstGeom prst="rect">
             <a:avLst/>
@@ -8990,15 +8990,15 @@
           <p:nvPr/>
         </p:nvPicPr>
         <p:blipFill>
-          <a:blip r:embed="rId2"/>
+          <a:blip r:embed="rId5"/>
           <a:stretch>
             <a:fillRect/>
           </a:stretch>
         </p:blipFill>
         <p:spPr>
           <a:xfrm>
-            <a:off x="566928" y="3800200"/>
-            <a:ext cx="10717000" cy="2143400"/>
+            <a:off x="2912617" y="3800200"/>
+            <a:ext cx="6025622" cy="2143400"/>
           </a:xfrm>
           <a:prstGeom prst="rect">
             <a:avLst/>
@@ -9290,15 +9290,15 @@
           <p:nvPr/>
         </p:nvPicPr>
         <p:blipFill>
-          <a:blip r:embed="rId2"/>
+          <a:blip r:embed="rId5"/>
           <a:stretch>
             <a:fillRect/>
           </a:stretch>
         </p:blipFill>
         <p:spPr>
           <a:xfrm>
-            <a:off x="566928" y="3800200"/>
-            <a:ext cx="8573600" cy="2143400"/>
+            <a:off x="1584926" y="3800200"/>
+            <a:ext cx="6537603" cy="2143400"/>
           </a:xfrm>
           <a:prstGeom prst="rect">
             <a:avLst/>
@@ -9522,7 +9522,7 @@
                 </a:solidFill>
                 <a:latin typeface="Red Hat Text"/>
               </a:rPr>
-              <a:t>In production, no human runs kubectl apply. Every change follows a GitOps pipeline: Developer opens PR → CI validates (kubeval, conftest) → staging deploy + test → peer review → merge triggers ArgoCD/Flux sync.</a:t>
+              <a:t>In production, no human runs kubectl apply. Every change follows a GitOps pipeline: Developer opens PR → CI validates (kubeconform, conftest) → staging deploy + test → peer review → merge triggers ArgoCD/Flux sync.</a:t>
             </a:r>
           </a:p>
           <a:p>
@@ -9572,15 +9572,15 @@
           <p:nvPr/>
         </p:nvPicPr>
         <p:blipFill>
-          <a:blip r:embed="rId2"/>
+          <a:blip r:embed="rId5"/>
           <a:stretch>
             <a:fillRect/>
           </a:stretch>
         </p:blipFill>
         <p:spPr>
           <a:xfrm>
-            <a:off x="566928" y="3800200"/>
-            <a:ext cx="11057700" cy="1382212"/>
+            <a:off x="2984690" y="3800200"/>
+            <a:ext cx="6222176" cy="1382212"/>
           </a:xfrm>
           <a:prstGeom prst="rect">
             <a:avLst/>
